--- a/slides/mapreduce/mapreduce_by_Mahmoud_Parsian/03_introduction_to_mapreduce.pptx
+++ b/slides/mapreduce/mapreduce_by_Mahmoud_Parsian/03_introduction_to_mapreduce.pptx
@@ -350,7 +350,7 @@
           <a:p>
             <a:fld id="{E4A339D8-22F0-475C-B334-1F0744A43D93}" type="datetimeFigureOut">
               <a:rPr lang="en-US" smtClean="0"/>
-              <a:t>12/26/22</a:t>
+              <a:t>8/30/26</a:t>
             </a:fld>
             <a:endParaRPr lang="en-US"/>
           </a:p>
@@ -515,7 +515,7 @@
           <a:p>
             <a:fld id="{C00E3EC3-E9A6-4745-96A2-3B207558CE44}" type="datetimeFigureOut">
               <a:rPr lang="en-US" smtClean="0"/>
-              <a:t>12/26/22</a:t>
+              <a:t>8/30/26</a:t>
             </a:fld>
             <a:endParaRPr lang="en-US"/>
           </a:p>
@@ -11857,7 +11857,7 @@
           </a:bodyPr>
           <a:lstStyle/>
           <a:p>
-            <a:pPr>
+            <a:pPr algn="ctr">
               <a:spcBef>
                 <a:spcPts val="0"/>
               </a:spcBef>
@@ -11891,7 +11891,7 @@
                   <a:srgbClr val="0000FF"/>
                 </a:solidFill>
               </a:rPr>
-              <a:t>to</a:t>
+              <a:t>to </a:t>
             </a:r>
             <a:br>
               <a:rPr lang="en-US" sz="7200" b="1" dirty="0">
@@ -11940,12 +11940,12 @@
           <a:p>
             <a:r>
               <a:rPr lang="en-US" sz="3600" dirty="0"/>
-              <a:t>Mahmoud  Parsian</a:t>
-            </a:r>
-          </a:p>
-          <a:p>
-            <a:r>
-              <a:rPr lang="en-US" sz="1800" dirty="0"/>
+              <a:t>Mahmoud Parsian</a:t>
+            </a:r>
+          </a:p>
+          <a:p>
+            <a:r>
+              <a:rPr lang="en-US" sz="2500" dirty="0"/>
               <a:t>Ph.D. in Computer Science</a:t>
             </a:r>
           </a:p>
@@ -12328,7 +12328,7 @@
                   </a:schemeClr>
                 </a:solidFill>
               </a:rPr>
-              <a:t>: since it is very complicated and it has lots of moving parts,</a:t>
+              <a:t>, since it is very complicated and has lots of moving parts,</a:t>
             </a:r>
           </a:p>
           <a:p>
@@ -12518,7 +12518,7 @@
                   <a:srgbClr val="002060"/>
                 </a:solidFill>
               </a:rPr>
-              <a:t>s everyday!</a:t>
+              <a:t>s every day!</a:t>
             </a:r>
           </a:p>
           <a:p>
@@ -12704,7 +12704,7 @@
               <a:rPr lang="en-US" sz="1650" dirty="0">
                 <a:latin typeface="Courier" pitchFamily="2" charset="0"/>
               </a:rPr>
-              <a:t>key: as a partition number, or a record number</a:t>
+              <a:t>key: a partition number, or a record number</a:t>
             </a:r>
           </a:p>
           <a:p>
@@ -12722,7 +12722,7 @@
               <a:rPr lang="en-US" sz="2100" dirty="0">
                 <a:latin typeface="Courier" pitchFamily="2" charset="0"/>
               </a:rPr>
-              <a:t>Outputs { {k2, v2), … }</a:t>
+              <a:t>Outputs: { (k2, v2), …}</a:t>
             </a:r>
           </a:p>
           <a:p>
@@ -13015,7 +13015,7 @@
                 </a:solidFill>
                 <a:latin typeface="Courier" pitchFamily="2" charset="0"/>
               </a:rPr>
-              <a:t>map()</a:t>
+              <a:t>map() </a:t>
             </a:r>
             <a:r>
               <a:rPr lang="en-US" dirty="0">
@@ -13173,7 +13173,7 @@
                   <a:srgbClr val="0000FF"/>
                 </a:solidFill>
               </a:rPr>
-              <a:t>serers</a:t>
+              <a:t>servers</a:t>
             </a:r>
             <a:endParaRPr lang="en-US" dirty="0">
               <a:solidFill>
@@ -13200,7 +13200,7 @@
                 </a:solidFill>
                 <a:latin typeface="Courier" pitchFamily="2" charset="0"/>
               </a:rPr>
-              <a:t>map()</a:t>
+              <a:t>map() </a:t>
             </a:r>
             <a:r>
               <a:rPr lang="en-US" dirty="0">
@@ -13384,7 +13384,7 @@
                 </a:solidFill>
                 <a:latin typeface="Courier" pitchFamily="2" charset="0"/>
               </a:rPr>
-              <a:t>Example-2: (”fox”, 3) denotes a (</a:t>
+              <a:t>Example-2: (“fox”, 3) denotes a (</a:t>
             </a:r>
             <a:r>
               <a:rPr lang="en-US" b="1" dirty="0">
@@ -18928,7 +18928,7 @@
               <a:rPr lang="en-US" dirty="0">
                 <a:hlinkClick r:id="rId2"/>
               </a:rPr>
-              <a:t>This book is an excellent source on MapReduce</a:t>
+              <a:t> This book is an excellent source on MapReduce.</a:t>
             </a:r>
             <a:endParaRPr lang="en-US" dirty="0"/>
           </a:p>
@@ -25300,7 +25300,7 @@
           <a:p>
             <a:r>
               <a:rPr lang="en-US" dirty="0"/>
-              <a:t>MapReduce:  as a Model/Architecture</a:t>
+              <a:t>MapReduce: as a Model/Architecture</a:t>
             </a:r>
           </a:p>
         </p:txBody>
@@ -25532,7 +25532,7 @@
                 <a:latin typeface="Courier New" pitchFamily="49" charset="0"/>
                 <a:cs typeface="Courier New" pitchFamily="49" charset="0"/>
               </a:rPr>
-              <a:t>(the, 1) (teacher, 1) (went, 1) (to, 1) (the, 1) (store, 1) (the, 1) (store, 1) (was, 1) (closed, 1) (the, 1) (store,1) (opens, 1) (in, 1) (the, 1) (morning, 1) (the 1) (store, 1) (opens, 1) (at, 1) (9am, 1)</a:t>
+              <a:t>(the, 1) (teacher, 1) (went, 1) (to, 1) (the, 1) (store, 1) (the, 1) (store, 1) (was, 1) (closed, 1) (the, 1) (store, 1) (opens, 1) (in, 1) (the, 1) (morning, 1) (the, 1) (store, 1) (opens, 1) (at, 1) (9am, 1)</a:t>
             </a:r>
           </a:p>
           <a:p>
@@ -25791,7 +25791,7 @@
                   <a:srgbClr val="663300"/>
                 </a:solidFill>
               </a:rPr>
-              <a:t>, 1) (opens,1) (in, 1) (</a:t>
+              <a:t>, 1) (opens, 1) (in, 1) (</a:t>
             </a:r>
             <a:r>
               <a:rPr lang="en-US" sz="2000" dirty="0">
@@ -25916,7 +25916,7 @@
                   <a:schemeClr val="tx1"/>
                 </a:solidFill>
               </a:rPr>
-              <a:t>1, 1, 1</a:t>
+              <a:t>1, 1, 1, 1</a:t>
             </a:r>
             <a:r>
               <a:rPr lang="en-US" sz="2400" dirty="0">
@@ -26136,7 +26136,7 @@
                   <a:schemeClr val="tx1"/>
                 </a:solidFill>
               </a:rPr>
-              <a:t>1, 1, 1</a:t>
+              <a:t>1, 1, 1, 1</a:t>
             </a:r>
             <a:r>
               <a:rPr lang="en-US" sz="2800" dirty="0">
@@ -26171,7 +26171,7 @@
                   <a:srgbClr val="663300"/>
                 </a:solidFill>
               </a:rPr>
-              <a:t>, 3)</a:t>
+              <a:t>, 4)</a:t>
             </a:r>
           </a:p>
           <a:p>
@@ -27017,7 +27017,7 @@
           <a:p>
             <a:r>
               <a:rPr lang="en-US" dirty="0"/>
-              <a:t>MapReduce Job:  </a:t>
+              <a:t>MapReduce Job: </a:t>
             </a:r>
             <a:r>
               <a:rPr lang="en-US" dirty="0">
@@ -27036,7 +27036,7 @@
             </a:br>
             <a:r>
               <a:rPr lang="en-US" dirty="0"/>
-              <a:t>Reducers output  will be written to output path</a:t>
+              <a:t>. Reducers output will be written to output path.</a:t>
             </a:r>
           </a:p>
         </p:txBody>
@@ -28594,14 +28594,14 @@
           <a:p>
             <a:r>
               <a:rPr lang="en-US" sz="2000" dirty="0"/>
-              <a:t>MapReduce Job:  map() function</a:t>
+              <a:t>MapReduce Job: map() function.</a:t>
             </a:r>
             <a:br>
               <a:rPr lang="en-US" sz="2000" dirty="0"/>
             </a:br>
             <a:r>
               <a:rPr lang="en-US" sz="2000" dirty="0"/>
-              <a:t>FILTER: Ignore words with length of less than 3 Chars.</a:t>
+              <a:t> FILTER: Ignore words with length of less than 3 Chars.</a:t>
             </a:r>
           </a:p>
         </p:txBody>
@@ -29177,14 +29177,14 @@
           <a:p>
             <a:r>
               <a:rPr lang="en-US" sz="2000" dirty="0"/>
-              <a:t>MapReduce Job:  map() function</a:t>
+              <a:t>MapReduce Job: map() function.</a:t>
             </a:r>
             <a:br>
               <a:rPr lang="en-US" sz="2000" dirty="0"/>
             </a:br>
             <a:r>
               <a:rPr lang="en-US" sz="2000" dirty="0"/>
-              <a:t>Ignore words with length of less than 3 Chars.</a:t>
+              <a:t> Ignore words with length of less than 3 Chars.</a:t>
             </a:r>
           </a:p>
         </p:txBody>
@@ -29532,21 +29532,21 @@
           <a:p>
             <a:r>
               <a:rPr lang="en-US" sz="2000" dirty="0"/>
-              <a:t>MapReduce Job:  map() function</a:t>
+              <a:t>MapReduce Job: map() function.</a:t>
             </a:r>
             <a:br>
               <a:rPr lang="en-US" sz="2000" dirty="0"/>
             </a:br>
             <a:r>
               <a:rPr lang="en-US" sz="2000" dirty="0"/>
-              <a:t>FILTER-1: Ignore records with length of less than 80 chars</a:t>
+              <a:t> FILTER-1: Ignore records with length of less than 80 chars.</a:t>
             </a:r>
             <a:br>
               <a:rPr lang="en-US" sz="2000" dirty="0"/>
             </a:br>
             <a:r>
               <a:rPr lang="en-US" sz="2000" dirty="0"/>
-              <a:t>FILTER-2: ignore words less than 3 characters</a:t>
+              <a:t> FILTER-2: ignore words less than 3 characters.</a:t>
             </a:r>
           </a:p>
         </p:txBody>
@@ -32055,21 +32055,21 @@
           <a:p>
             <a:r>
               <a:rPr lang="en-US" sz="1400" dirty="0"/>
-              <a:t>MapReduce Job:  reduce() function + what if we want to ignore</a:t>
+              <a:t>MapReduce Job: reduce() function + what if we want to ignore </a:t>
             </a:r>
             <a:br>
               <a:rPr lang="en-US" sz="1400" dirty="0"/>
             </a:br>
             <a:r>
               <a:rPr lang="en-US" sz="1400" dirty="0"/>
-              <a:t>words with frequencies of less than 5 </a:t>
+              <a:t>words with frequencies of less than 5, and </a:t>
             </a:r>
             <a:br>
               <a:rPr lang="en-US" sz="1400" dirty="0"/>
             </a:br>
             <a:r>
               <a:rPr lang="en-US" sz="1400" dirty="0"/>
-              <a:t>Ignore words with length of less than 3 Chars.</a:t>
+              <a:t>ignore words with length of less than 3 Chars.</a:t>
             </a:r>
           </a:p>
         </p:txBody>
@@ -32751,7 +32751,7 @@
             </a:r>
             <a:r>
               <a:rPr lang="en-US" sz="2800" dirty="0"/>
-              <a:t>of data per day in 2020</a:t>
+              <a:t>of data per day in 2020.</a:t>
             </a:r>
           </a:p>
           <a:p>
@@ -39466,11 +39466,11 @@
                   </a:outerShdw>
                 </a:effectLst>
               </a:rPr>
-              <a:t>norm </a:t>
+              <a:t>the norm </a:t>
             </a:r>
             <a:r>
               <a:rPr lang="en-US" sz="3800" dirty="0"/>
-              <a:t> in commodity hardware</a:t>
+              <a:t>in commodity hardware</a:t>
             </a:r>
           </a:p>
           <a:p>
@@ -39562,7 +39562,7 @@
                   <a:srgbClr val="663300"/>
                 </a:solidFill>
               </a:rPr>
-              <a:t>lost 1600 of 1800 machines once!</a:t>
+              <a:t>lost 1600 of 1800 machines once</a:t>
             </a:r>
             <a:r>
               <a:rPr lang="en-US" dirty="0"/>
@@ -39574,7 +39574,7 @@
                   <a:srgbClr val="CC00CC"/>
                 </a:solidFill>
               </a:rPr>
-              <a:t>finished fine </a:t>
+              <a:t>finished fine!</a:t>
             </a:r>
           </a:p>
         </p:txBody>
@@ -40987,7 +40987,7 @@
             </a:br>
             <a:r>
               <a:rPr lang="en-US" dirty="0"/>
-              <a:t>in  MapReduce/Hadoop</a:t>
+              <a:t> in MapReduce/Hadoop</a:t>
             </a:r>
           </a:p>
         </p:txBody>
@@ -42204,7 +42204,7 @@
           <a:p>
             <a:r>
               <a:rPr lang="en-US" dirty="0"/>
-              <a:t>What is a Cluster Computing?</a:t>
+              <a:t>What is Cluster Computing?</a:t>
             </a:r>
           </a:p>
         </p:txBody>
@@ -42367,14 +42367,14 @@
           <a:p>
             <a:r>
               <a:rPr lang="en-US" dirty="0"/>
-              <a:t>What is a Cluster Computing?</a:t>
+              <a:t>What is Cluster Computing?</a:t>
             </a:r>
             <a:br>
               <a:rPr lang="en-US" dirty="0"/>
             </a:br>
             <a:r>
               <a:rPr lang="en-US" dirty="0"/>
-              <a:t>Perform tasks in parallel using a set of computers</a:t>
+              <a:t> Perform tasks in parallel using a set of computers.</a:t>
             </a:r>
           </a:p>
         </p:txBody>
